--- a/public/fun/pack/pptx/weddingpro/결혼식프리미엄_38_식순중심_퓨터실버.pptx
+++ b/public/fun/pack/pptx/weddingpro/결혼식프리미엄_38_식순중심_퓨터실버.pptx
@@ -113,12 +113,12 @@
   <p:extLst>
     <p:ext uri="{521415D9-36F7-43E2-AB2F-B90AF26B5E84}">
       <p14:sectionLst xmlns:p14="http://schemas.microsoft.com/office/powerpoint/2010/main">
-        <p14:section name="시작" id="{B8049BC6-A21F-40B4-9AD9-4B452CDC3752}">
+        <p14:section name="시작" id="{86BDDFB1-554C-4A0A-B671-525E2237169B}">
           <p14:sldIdLst>
             <p14:sldId id="256"/>
           </p14:sldIdLst>
         </p14:section>
-        <p14:section name="본문" id="{57E66AB0-104D-40A2-9F5B-3468641B751D}">
+        <p14:section name="본문" id="{0340D188-0990-4E5A-A1F7-D2D5DEA8D577}">
           <p14:sldIdLst>
             <p14:sldId id="257"/>
             <p14:sldId id="258"/>
@@ -127,7 +127,7 @@
             <p14:sldId id="261"/>
           </p14:sldIdLst>
         </p14:section>
-        <p14:section name="마무리" id="{58C591FB-E76C-42BD-B9DB-3C9462967F41}">
+        <p14:section name="마무리" id="{DFE90BBB-ECE9-4902-B8C5-82F15F84A270}">
           <p14:sldIdLst>
             <p14:sldId id="262"/>
           </p14:sldIdLst>
@@ -2742,7 +2742,7 @@
             </a:lvl1pPr>
           </a:lstStyle>
           <a:p>
-            <a:fld id="{2B1ED2DD-8AED-42AE-A8A2-EDFF1250246E}" type="slidenum">
+            <a:fld id="{292CFE7D-E0DA-484B-AFCD-A4910FFDFE95}" type="slidenum">
               <a:rPr lang="en-US"/>
               <a:t>‹#›</a:t>
             </a:fld>
@@ -4587,7 +4587,7 @@
             </a:lvl1pPr>
           </a:lstStyle>
           <a:p>
-            <a:fld id="{7EB5736B-9CD2-4769-A0C5-2DB55620064E}" type="slidenum">
+            <a:fld id="{3193CACE-B161-45B6-9A46-A67F75A3E30A}" type="slidenum">
               <a:rPr lang="en-US"/>
               <a:t>‹#›</a:t>
             </a:fld>
@@ -5224,7 +5224,7 @@
             </a:lvl1pPr>
           </a:lstStyle>
           <a:p>
-            <a:fld id="{D33D00CA-FEF6-48AC-95E7-E45087C79B75}" type="slidenum">
+            <a:fld id="{090EBECB-8F20-44D5-87D0-9FCCF4BF0C2C}" type="slidenum">
               <a:rPr lang="en-US"/>
               <a:t>‹#›</a:t>
             </a:fld>
@@ -6091,7 +6091,7 @@
           <a:p>
             <a:r>
               <a:rPr lang="ko-KR"/>
-              <a:t>0000. 00. 00 · 예식장 이름</a:t>
+              <a:t>날짜 입력 · 예식장 이름</a:t>
             </a:r>
           </a:p>
         </p:txBody>
@@ -6314,7 +6314,7 @@
           <a:bodyPr/>
           <a:lstStyle/>
           <a:p>
-            <a:fld id="{FAF50FE0-F65B-467B-9F67-7D0FEF166785}" type="slidenum">
+            <a:fld id="{F43175EE-F938-4149-8395-4914EC1543A0}" type="slidenum">
               <a:rPr lang="en-US"/>
               <a:t>‹#›</a:t>
             </a:fld>
@@ -6722,7 +6722,7 @@
           <a:bodyPr/>
           <a:lstStyle/>
           <a:p>
-            <a:fld id="{404438A6-3E9D-44A8-BD21-C4B9A265638E}" type="slidenum">
+            <a:fld id="{4E62C485-78F7-4DC2-B3CC-E6EB56019E05}" type="slidenum">
               <a:rPr lang="en-US"/>
               <a:t>‹#›</a:t>
             </a:fld>
@@ -7551,7 +7551,7 @@
           <a:bodyPr/>
           <a:lstStyle/>
           <a:p>
-            <a:fld id="{5C55286C-74C9-405A-B863-89B3A86E251F}" type="slidenum">
+            <a:fld id="{8FEFE174-4FEA-4529-9F2C-6B4EA656F251}" type="slidenum">
               <a:rPr lang="en-US"/>
               <a:t>‹#›</a:t>
             </a:fld>
@@ -8824,7 +8824,7 @@
           <a:bodyPr/>
           <a:lstStyle/>
           <a:p>
-            <a:fld id="{55D012B9-F80A-4700-B891-65D1F33599C7}" type="slidenum">
+            <a:fld id="{8BD1EEAA-C39E-4491-923A-7C5672A380AD}" type="slidenum">
               <a:rPr lang="en-US"/>
               <a:t>‹#›</a:t>
             </a:fld>
@@ -8912,7 +8912,7 @@
           <a:bodyPr/>
           <a:lstStyle/>
           <a:p>
-            <a:fld id="{F5FE3867-CCF5-4EFD-94D4-B90E9819BDD6}" type="slidenum">
+            <a:fld id="{EEC0F2D5-CAB6-40A4-9CAF-D1BF22AA1112}" type="slidenum">
               <a:rPr lang="en-US"/>
               <a:t>‹#›</a:t>
             </a:fld>
